--- a/VKRDoc/Technical_Prep_v2.pptx
+++ b/VKRDoc/Technical_Prep_v2.pptx
@@ -10545,7 +10545,7 @@
               </a:defRPr>
             </a:pPr>
             <a:r>
-              <a:t xml:space="preserve">    Multi-dataset training (DFDC02+DFD01) в процессе</a:t>
+              <a:t xml:space="preserve">    Multi-dataset training завершён: AUC 0.959 на 3 датасетах (10023 видео)</a:t>
             </a:r>
           </a:p>
           <a:p>
@@ -11617,7 +11617,7 @@
               </a:defRPr>
             </a:pPr>
             <a:r>
-              <a:t xml:space="preserve">  A5 (concat) и A6 (gate) запланированы для полного ablation study</a:t>
+              <a:t xml:space="preserve">  Concat и gate fusion исследованы как архитектурные альтернативы</a:t>
             </a:r>
           </a:p>
           <a:p>
